--- a/pp/Final.pptx
+++ b/pp/Final.pptx
@@ -5,10 +5,11 @@
     <p:sldMasterId id="2147483648" r:id="rId1"/>
   </p:sldMasterIdLst>
   <p:sldIdLst>
-    <p:sldId id="256" r:id="rId2"/>
-    <p:sldId id="257" r:id="rId3"/>
-    <p:sldId id="258" r:id="rId4"/>
-    <p:sldId id="259" r:id="rId5"/>
+    <p:sldId id="260" r:id="rId2"/>
+    <p:sldId id="256" r:id="rId3"/>
+    <p:sldId id="257" r:id="rId4"/>
+    <p:sldId id="258" r:id="rId5"/>
+    <p:sldId id="259" r:id="rId6"/>
   </p:sldIdLst>
   <p:sldSz cx="12192000" cy="6858000"/>
   <p:notesSz cx="6858000" cy="9144000"/>
@@ -3564,6 +3565,125 @@
           <a:chExt cx="0" cy="0"/>
         </a:xfrm>
       </p:grpSpPr>
+      <p:sp>
+        <p:nvSpPr>
+          <p:cNvPr id="2" name="Title 1">
+            <a:extLst>
+              <a:ext uri="{FF2B5EF4-FFF2-40B4-BE49-F238E27FC236}">
+                <a16:creationId xmlns:a16="http://schemas.microsoft.com/office/drawing/2014/main" id="{F03FA0F8-416A-700D-36C0-E59BF6F7C874}"/>
+              </a:ext>
+            </a:extLst>
+          </p:cNvPr>
+          <p:cNvSpPr>
+            <a:spLocks noGrp="1"/>
+          </p:cNvSpPr>
+          <p:nvPr>
+            <p:ph type="title"/>
+          </p:nvPr>
+        </p:nvSpPr>
+        <p:spPr/>
+        <p:txBody>
+          <a:bodyPr/>
+          <a:lstStyle/>
+          <a:p>
+            <a:r>
+              <a:rPr lang="en-US" dirty="0"/>
+              <a:t>Overview</a:t>
+            </a:r>
+          </a:p>
+        </p:txBody>
+      </p:sp>
+      <p:sp>
+        <p:nvSpPr>
+          <p:cNvPr id="3" name="Content Placeholder 2">
+            <a:extLst>
+              <a:ext uri="{FF2B5EF4-FFF2-40B4-BE49-F238E27FC236}">
+                <a16:creationId xmlns:a16="http://schemas.microsoft.com/office/drawing/2014/main" id="{E5C8BA73-C5A7-2C14-2786-A74DAABDCED2}"/>
+              </a:ext>
+            </a:extLst>
+          </p:cNvPr>
+          <p:cNvSpPr>
+            <a:spLocks noGrp="1"/>
+          </p:cNvSpPr>
+          <p:nvPr>
+            <p:ph idx="1"/>
+          </p:nvPr>
+        </p:nvSpPr>
+        <p:spPr/>
+        <p:txBody>
+          <a:bodyPr/>
+          <a:lstStyle/>
+          <a:p>
+            <a:r>
+              <a:rPr lang="en-US" dirty="0"/>
+              <a:t>What is the current trend of Space launch</a:t>
+            </a:r>
+          </a:p>
+          <a:p>
+            <a:endParaRPr lang="en-US" dirty="0"/>
+          </a:p>
+          <a:p>
+            <a:r>
+              <a:rPr lang="en-US" dirty="0"/>
+              <a:t>How will it impact both coasts</a:t>
+            </a:r>
+          </a:p>
+          <a:p>
+            <a:endParaRPr lang="en-US" dirty="0"/>
+          </a:p>
+          <a:p>
+            <a:r>
+              <a:rPr lang="en-US" dirty="0"/>
+              <a:t>What is mission assurance</a:t>
+            </a:r>
+          </a:p>
+          <a:p>
+            <a:endParaRPr lang="en-US" dirty="0"/>
+          </a:p>
+          <a:p>
+            <a:r>
+              <a:rPr lang="en-US" dirty="0"/>
+              <a:t>Why mission assurance standards needs to be kept the same</a:t>
+            </a:r>
+          </a:p>
+          <a:p>
+            <a:endParaRPr lang="en-US" dirty="0"/>
+          </a:p>
+          <a:p>
+            <a:endParaRPr lang="en-US" dirty="0"/>
+          </a:p>
+        </p:txBody>
+      </p:sp>
+    </p:spTree>
+    <p:extLst>
+      <p:ext uri="{BB962C8B-B14F-4D97-AF65-F5344CB8AC3E}">
+        <p14:creationId xmlns:p14="http://schemas.microsoft.com/office/powerpoint/2010/main" val="2195391229"/>
+      </p:ext>
+    </p:extLst>
+  </p:cSld>
+  <p:clrMapOvr>
+    <a:masterClrMapping/>
+  </p:clrMapOvr>
+</p:sld>
+</file>
+
+<file path=ppt/slides/slide2.xml><?xml version="1.0" encoding="utf-8"?>
+<p:sld xmlns:a="http://schemas.openxmlformats.org/drawingml/2006/main" xmlns:r="http://schemas.openxmlformats.org/officeDocument/2006/relationships" xmlns:p="http://schemas.openxmlformats.org/presentationml/2006/main">
+  <p:cSld>
+    <p:spTree>
+      <p:nvGrpSpPr>
+        <p:cNvPr id="1" name=""/>
+        <p:cNvGrpSpPr/>
+        <p:nvPr/>
+      </p:nvGrpSpPr>
+      <p:grpSpPr>
+        <a:xfrm>
+          <a:off x="0" y="0"/>
+          <a:ext cx="0" cy="0"/>
+          <a:chOff x="0" y="0"/>
+          <a:chExt cx="0" cy="0"/>
+        </a:xfrm>
+      </p:grpSpPr>
       <p:pic>
         <p:nvPicPr>
           <p:cNvPr id="5" name="Picture 4" descr="The graph illustrates the increase in commercial space launches from 1990 to 2025, with NASA and SpaceX being significant contributors.&#10;&#10;AI-generated content may be incorrect.">
@@ -3613,7 +3733,7 @@
 </p:sld>
 </file>
 
-<file path=ppt/slides/slide2.xml><?xml version="1.0" encoding="utf-8"?>
+<file path=ppt/slides/slide3.xml><?xml version="1.0" encoding="utf-8"?>
 <p:sld xmlns:a="http://schemas.openxmlformats.org/drawingml/2006/main" xmlns:r="http://schemas.openxmlformats.org/officeDocument/2006/relationships" xmlns:p="http://schemas.openxmlformats.org/presentationml/2006/main">
   <p:cSld>
     <p:spTree>
@@ -3715,7 +3835,7 @@
 </p:sld>
 </file>
 
-<file path=ppt/slides/slide3.xml><?xml version="1.0" encoding="utf-8"?>
+<file path=ppt/slides/slide4.xml><?xml version="1.0" encoding="utf-8"?>
 <p:sld xmlns:a="http://schemas.openxmlformats.org/drawingml/2006/main" xmlns:r="http://schemas.openxmlformats.org/officeDocument/2006/relationships" xmlns:p="http://schemas.openxmlformats.org/presentationml/2006/main">
   <p:cSld>
     <p:bg>
@@ -3834,7 +3954,7 @@
 </p:sld>
 </file>
 
-<file path=ppt/slides/slide4.xml><?xml version="1.0" encoding="utf-8"?>
+<file path=ppt/slides/slide5.xml><?xml version="1.0" encoding="utf-8"?>
 <p:sld xmlns:a="http://schemas.openxmlformats.org/drawingml/2006/main" xmlns:r="http://schemas.openxmlformats.org/officeDocument/2006/relationships" xmlns:p="http://schemas.openxmlformats.org/presentationml/2006/main">
   <p:cSld>
     <p:spTree>
@@ -3912,15 +4032,7 @@
           <a:p>
             <a:r>
               <a:rPr lang="en-US" dirty="0"/>
-              <a:t>More people to support increase of missions(roughly 10 per mission </a:t>
-            </a:r>
-            <a:r>
-              <a:rPr lang="en-US"/>
-              <a:t>per coast, </a:t>
-            </a:r>
-            <a:r>
-              <a:rPr lang="en-US" dirty="0"/>
-              <a:t>double if 2 missions are happening at once)</a:t>
+              <a:t>More people to support increase of missions(10 personnel minimum per mission per coast, double if 2 missions are happening at once)</a:t>
             </a:r>
           </a:p>
           <a:p>

--- a/pp/Final.pptx
+++ b/pp/Final.pptx
@@ -3654,13 +3654,8 @@
           <a:p>
             <a:r>
               <a:rPr lang="en-US" dirty="0"/>
-              <a:t>Our recommendations to each squadron to prepare for more </a:t>
-            </a:r>
-            <a:r>
-              <a:rPr lang="en-US"/>
-              <a:t>Space flight</a:t>
-            </a:r>
-            <a:endParaRPr lang="en-US" dirty="0"/>
+              <a:t>Our recommendations to each squadron to prepare for more Space flight</a:t>
+            </a:r>
           </a:p>
           <a:p>
             <a:endParaRPr lang="en-US" dirty="0"/>
@@ -4009,10 +4004,9 @@
           <a:lstStyle/>
           <a:p>
             <a:r>
-              <a:rPr lang="en-US"/>
+              <a:rPr lang="en-US" dirty="0"/>
               <a:t>Recommendations</a:t>
             </a:r>
-            <a:endParaRPr lang="en-US" dirty="0"/>
           </a:p>
         </p:txBody>
       </p:sp>
